--- a/Лекции/ООП 2 лек 2.pptx
+++ b/Лекции/ООП 2 лек 2.pptx
@@ -243,7 +243,7 @@
             <a:fld id="{AA2F9473-F066-431E-A6E8-1D478C995A6B}" type="datetimeFigureOut">
               <a:rPr lang="en-US" smtClean="0"/>
               <a:pPr/>
-              <a:t>2/15/2026</a:t>
+              <a:t>2/18/2026</a:t>
             </a:fld>
             <a:endParaRPr lang="en-US"/>
           </a:p>

--- a/Лекции/ООП 2 лек 2.pptx
+++ b/Лекции/ООП 2 лек 2.pptx
@@ -243,7 +243,7 @@
             <a:fld id="{AA2F9473-F066-431E-A6E8-1D478C995A6B}" type="datetimeFigureOut">
               <a:rPr lang="en-US" smtClean="0"/>
               <a:pPr/>
-              <a:t>2/18/2026</a:t>
+              <a:t>4/25/2026</a:t>
             </a:fld>
             <a:endParaRPr lang="en-US"/>
           </a:p>
@@ -13457,7 +13457,7 @@
         <p:spPr>
           <a:xfrm>
             <a:off x="0" y="0"/>
-            <a:ext cx="12192000" cy="5632311"/>
+            <a:ext cx="12192000" cy="6001643"/>
           </a:xfrm>
           <a:prstGeom prst="rect">
             <a:avLst/>
@@ -13469,8 +13469,19 @@
           </a:bodyPr>
           <a:lstStyle/>
           <a:p>
-            <a:r>
-              <a:rPr lang="en-US" sz="2400" dirty="0">
+            <a:endParaRPr lang="en-US" sz="2400" dirty="0" smtClean="0">
+              <a:solidFill>
+                <a:srgbClr val="0000FF"/>
+              </a:solidFill>
+              <a:highlight>
+                <a:srgbClr val="FFFFFF"/>
+              </a:highlight>
+              <a:latin typeface="Cascadia Mono" panose="020B0609020000020004" pitchFamily="49" charset="0"/>
+            </a:endParaRPr>
+          </a:p>
+          <a:p>
+            <a:r>
+              <a:rPr lang="en-US" sz="2400" dirty="0" smtClean="0">
                 <a:solidFill>
                   <a:srgbClr val="0000FF"/>
                 </a:solidFill>
@@ -13482,7 +13493,7 @@
               <a:t>using</a:t>
             </a:r>
             <a:r>
-              <a:rPr lang="en-US" sz="2400" dirty="0">
+              <a:rPr lang="en-US" sz="2400" dirty="0" smtClean="0">
                 <a:solidFill>
                   <a:srgbClr val="000000"/>
                 </a:solidFill>
@@ -14390,7 +14401,7 @@
         <p:spPr>
           <a:xfrm>
             <a:off x="0" y="0"/>
-            <a:ext cx="12192000" cy="6555641"/>
+            <a:ext cx="12192000" cy="6232475"/>
           </a:xfrm>
           <a:prstGeom prst="rect">
             <a:avLst/>
@@ -14837,7 +14848,7 @@
                 </a:highlight>
                 <a:latin typeface="Cascadia Mono" panose="020B0609020000020004" pitchFamily="49" charset="0"/>
               </a:rPr>
-              <a:t>			</a:t>
+              <a:t>	</a:t>
             </a:r>
             <a:r>
               <a:rPr lang="ru-RU" sz="2100" dirty="0" smtClean="0">
